--- a/01_Einführung/01_HelloWorld.pptx
+++ b/01_Einführung/01_HelloWorld.pptx
@@ -9,19 +9,18 @@
     <p:sldMasterId id="2147483675" r:id="rId5"/>
   </p:sldMasterIdLst>
   <p:notesMasterIdLst>
-    <p:notesMasterId r:id="rId13"/>
+    <p:notesMasterId r:id="rId12"/>
   </p:notesMasterIdLst>
   <p:handoutMasterIdLst>
-    <p:handoutMasterId r:id="rId14"/>
+    <p:handoutMasterId r:id="rId13"/>
   </p:handoutMasterIdLst>
   <p:sldIdLst>
     <p:sldId id="274" r:id="rId6"/>
-    <p:sldId id="275" r:id="rId7"/>
-    <p:sldId id="263" r:id="rId8"/>
-    <p:sldId id="278" r:id="rId9"/>
+    <p:sldId id="263" r:id="rId7"/>
+    <p:sldId id="278" r:id="rId8"/>
+    <p:sldId id="275" r:id="rId9"/>
     <p:sldId id="276" r:id="rId10"/>
-    <p:sldId id="261" r:id="rId11"/>
-    <p:sldId id="277" r:id="rId12"/>
+    <p:sldId id="277" r:id="rId11"/>
   </p:sldIdLst>
   <p:sldSz cx="9144000" cy="6858000" type="screen4x3"/>
   <p:notesSz cx="6858000" cy="9926638"/>
@@ -290,7 +289,7 @@
               <a:pPr>
                 <a:defRPr/>
               </a:pPr>
-              <a:t>18.09.2020</a:t>
+              <a:t>15.09.2021</a:t>
             </a:fld>
             <a:endParaRPr lang="de-AT"/>
           </a:p>
@@ -505,7 +504,7 @@
               <a:pPr>
                 <a:defRPr/>
               </a:pPr>
-              <a:t>18.09.2020</a:t>
+              <a:t>15.09.2021</a:t>
             </a:fld>
             <a:endParaRPr lang="de-AT"/>
           </a:p>
@@ -4292,7 +4291,7 @@
             <a:fld id="{ABC9E1A3-5F60-4045-A7A5-F47B61D1FECD}" type="datetimeFigureOut">
               <a:rPr lang="de-AT" smtClean="0"/>
               <a:pPr/>
-              <a:t>18.09.2020</a:t>
+              <a:t>15.09.2021</a:t>
             </a:fld>
             <a:endParaRPr lang="de-AT"/>
           </a:p>
@@ -4492,7 +4491,7 @@
             <a:fld id="{ABC9E1A3-5F60-4045-A7A5-F47B61D1FECD}" type="datetimeFigureOut">
               <a:rPr lang="de-AT" smtClean="0"/>
               <a:pPr/>
-              <a:t>18.09.2020</a:t>
+              <a:t>15.09.2021</a:t>
             </a:fld>
             <a:endParaRPr lang="de-AT"/>
           </a:p>
@@ -9093,205 +9092,6 @@
       </p:grpSpPr>
       <p:sp>
         <p:nvSpPr>
-          <p:cNvPr id="2" name="Titel 1"/>
-          <p:cNvSpPr>
-            <a:spLocks noGrp="1"/>
-          </p:cNvSpPr>
-          <p:nvPr>
-            <p:ph type="title"/>
-          </p:nvPr>
-        </p:nvSpPr>
-        <p:spPr/>
-        <p:txBody>
-          <a:bodyPr/>
-          <a:lstStyle/>
-          <a:p>
-            <a:r>
-              <a:rPr lang="de-AT" dirty="0"/>
-              <a:t>Unvermeidbar – Hello World in C#</a:t>
-            </a:r>
-          </a:p>
-        </p:txBody>
-      </p:sp>
-      <p:sp>
-        <p:nvSpPr>
-          <p:cNvPr id="3" name="Inhaltsplatzhalter 2"/>
-          <p:cNvSpPr>
-            <a:spLocks noGrp="1"/>
-          </p:cNvSpPr>
-          <p:nvPr>
-            <p:ph idx="1"/>
-          </p:nvPr>
-        </p:nvSpPr>
-        <p:spPr/>
-        <p:txBody>
-          <a:bodyPr/>
-          <a:lstStyle/>
-          <a:p>
-            <a:pPr marL="0" indent="0">
-              <a:buNone/>
-            </a:pPr>
-            <a:r>
-              <a:rPr lang="de-AT" sz="2000" dirty="0" err="1"/>
-              <a:t>using</a:t>
-            </a:r>
-            <a:r>
-              <a:rPr lang="de-AT" sz="2000" dirty="0"/>
-              <a:t> System;</a:t>
-            </a:r>
-          </a:p>
-          <a:p>
-            <a:pPr marL="0" indent="0">
-              <a:buNone/>
-            </a:pPr>
-            <a:endParaRPr lang="de-AT" sz="2000" dirty="0"/>
-          </a:p>
-          <a:p>
-            <a:pPr marL="0" indent="0">
-              <a:buNone/>
-            </a:pPr>
-            <a:r>
-              <a:rPr lang="de-AT" sz="2000" dirty="0" err="1"/>
-              <a:t>namespace</a:t>
-            </a:r>
-            <a:r>
-              <a:rPr lang="de-AT" sz="2000" dirty="0"/>
-              <a:t> </a:t>
-            </a:r>
-            <a:r>
-              <a:rPr lang="de-AT" sz="2000" dirty="0" err="1"/>
-              <a:t>HelloWorld</a:t>
-            </a:r>
-            <a:endParaRPr lang="de-AT" sz="2000" dirty="0"/>
-          </a:p>
-          <a:p>
-            <a:pPr marL="0" indent="0">
-              <a:buNone/>
-            </a:pPr>
-            <a:r>
-              <a:rPr lang="de-AT" sz="2000" dirty="0"/>
-              <a:t>{</a:t>
-            </a:r>
-          </a:p>
-          <a:p>
-            <a:pPr marL="0" indent="0">
-              <a:buNone/>
-            </a:pPr>
-            <a:r>
-              <a:rPr lang="de-AT" sz="2000" dirty="0"/>
-              <a:t>    </a:t>
-            </a:r>
-            <a:r>
-              <a:rPr lang="de-AT" sz="2000" dirty="0" err="1"/>
-              <a:t>class</a:t>
-            </a:r>
-            <a:r>
-              <a:rPr lang="de-AT" sz="2000" dirty="0"/>
-              <a:t> </a:t>
-            </a:r>
-            <a:r>
-              <a:rPr lang="de-AT" sz="2000" dirty="0" err="1"/>
-              <a:t>Program</a:t>
-            </a:r>
-            <a:endParaRPr lang="de-AT" sz="2000" dirty="0"/>
-          </a:p>
-          <a:p>
-            <a:pPr marL="0" indent="0">
-              <a:buNone/>
-            </a:pPr>
-            <a:r>
-              <a:rPr lang="de-AT" sz="2000" dirty="0"/>
-              <a:t>    {</a:t>
-            </a:r>
-          </a:p>
-          <a:p>
-            <a:pPr marL="0" indent="0">
-              <a:buNone/>
-            </a:pPr>
-            <a:r>
-              <a:rPr lang="en-US" sz="2000" dirty="0"/>
-              <a:t>        public static void Main()</a:t>
-            </a:r>
-          </a:p>
-          <a:p>
-            <a:pPr marL="0" indent="0">
-              <a:buNone/>
-            </a:pPr>
-            <a:r>
-              <a:rPr lang="de-AT" sz="2000" dirty="0"/>
-              <a:t>        {</a:t>
-            </a:r>
-          </a:p>
-          <a:p>
-            <a:pPr marL="0" indent="0">
-              <a:buNone/>
-            </a:pPr>
-            <a:r>
-              <a:rPr lang="de-AT" sz="2000" dirty="0"/>
-              <a:t>            Console.WriteLine("Hello World");</a:t>
-            </a:r>
-          </a:p>
-          <a:p>
-            <a:pPr marL="0" indent="0">
-              <a:buNone/>
-            </a:pPr>
-            <a:r>
-              <a:rPr lang="de-AT" sz="2000" dirty="0"/>
-              <a:t>        }</a:t>
-            </a:r>
-          </a:p>
-          <a:p>
-            <a:pPr marL="0" indent="0">
-              <a:buNone/>
-            </a:pPr>
-            <a:r>
-              <a:rPr lang="de-AT" sz="2000" dirty="0"/>
-              <a:t>    }</a:t>
-            </a:r>
-          </a:p>
-          <a:p>
-            <a:pPr marL="0" indent="0">
-              <a:buNone/>
-            </a:pPr>
-            <a:r>
-              <a:rPr lang="de-AT" sz="2000" dirty="0"/>
-              <a:t>}</a:t>
-            </a:r>
-          </a:p>
-        </p:txBody>
-      </p:sp>
-    </p:spTree>
-    <p:extLst>
-      <p:ext uri="{BB962C8B-B14F-4D97-AF65-F5344CB8AC3E}">
-        <p14:creationId xmlns:p14="http://schemas.microsoft.com/office/powerpoint/2010/main" val="1879775361"/>
-      </p:ext>
-    </p:extLst>
-  </p:cSld>
-  <p:clrMapOvr>
-    <a:masterClrMapping/>
-  </p:clrMapOvr>
-</p:sld>
-</file>
-
-<file path=ppt/slides/slide3.xml><?xml version="1.0" encoding="utf-8"?>
-<p:sld xmlns:a="http://schemas.openxmlformats.org/drawingml/2006/main" xmlns:r="http://schemas.openxmlformats.org/officeDocument/2006/relationships" xmlns:p="http://schemas.openxmlformats.org/presentationml/2006/main">
-  <p:cSld>
-    <p:spTree>
-      <p:nvGrpSpPr>
-        <p:cNvPr id="1" name=""/>
-        <p:cNvGrpSpPr/>
-        <p:nvPr/>
-      </p:nvGrpSpPr>
-      <p:grpSpPr>
-        <a:xfrm>
-          <a:off x="0" y="0"/>
-          <a:ext cx="0" cy="0"/>
-          <a:chOff x="0" y="0"/>
-          <a:chExt cx="0" cy="0"/>
-        </a:xfrm>
-      </p:grpSpPr>
-      <p:sp>
-        <p:nvSpPr>
           <p:cNvPr id="12290" name="Titel 1"/>
           <p:cNvSpPr>
             <a:spLocks noGrp="1"/>
@@ -9459,7 +9259,7 @@
 </p:sld>
 </file>
 
-<file path=ppt/slides/slide4.xml><?xml version="1.0" encoding="utf-8"?>
+<file path=ppt/slides/slide3.xml><?xml version="1.0" encoding="utf-8"?>
 <p:sld xmlns:a="http://schemas.openxmlformats.org/drawingml/2006/main" xmlns:r="http://schemas.openxmlformats.org/officeDocument/2006/relationships" xmlns:p="http://schemas.openxmlformats.org/presentationml/2006/main">
   <p:cSld>
     <p:spTree>
@@ -9754,6 +9554,154 @@
     <p:extLst>
       <p:ext uri="{BB962C8B-B14F-4D97-AF65-F5344CB8AC3E}">
         <p14:creationId xmlns:p14="http://schemas.microsoft.com/office/powerpoint/2010/main" val="4068365152"/>
+      </p:ext>
+    </p:extLst>
+  </p:cSld>
+  <p:clrMapOvr>
+    <a:masterClrMapping/>
+  </p:clrMapOvr>
+</p:sld>
+</file>
+
+<file path=ppt/slides/slide4.xml><?xml version="1.0" encoding="utf-8"?>
+<p:sld xmlns:a="http://schemas.openxmlformats.org/drawingml/2006/main" xmlns:r="http://schemas.openxmlformats.org/officeDocument/2006/relationships" xmlns:p="http://schemas.openxmlformats.org/presentationml/2006/main">
+  <p:cSld>
+    <p:spTree>
+      <p:nvGrpSpPr>
+        <p:cNvPr id="1" name=""/>
+        <p:cNvGrpSpPr/>
+        <p:nvPr/>
+      </p:nvGrpSpPr>
+      <p:grpSpPr>
+        <a:xfrm>
+          <a:off x="0" y="0"/>
+          <a:ext cx="0" cy="0"/>
+          <a:chOff x="0" y="0"/>
+          <a:chExt cx="0" cy="0"/>
+        </a:xfrm>
+      </p:grpSpPr>
+      <p:sp>
+        <p:nvSpPr>
+          <p:cNvPr id="2" name="Titel 1"/>
+          <p:cNvSpPr>
+            <a:spLocks noGrp="1"/>
+          </p:cNvSpPr>
+          <p:nvPr>
+            <p:ph type="title"/>
+          </p:nvPr>
+        </p:nvSpPr>
+        <p:spPr/>
+        <p:txBody>
+          <a:bodyPr/>
+          <a:lstStyle/>
+          <a:p>
+            <a:r>
+              <a:rPr lang="de-AT" dirty="0"/>
+              <a:t>Unvermeidbar – Hello World in C#</a:t>
+            </a:r>
+          </a:p>
+        </p:txBody>
+      </p:sp>
+      <p:sp>
+        <p:nvSpPr>
+          <p:cNvPr id="3" name="Inhaltsplatzhalter 2"/>
+          <p:cNvSpPr>
+            <a:spLocks noGrp="1"/>
+          </p:cNvSpPr>
+          <p:nvPr>
+            <p:ph idx="1"/>
+          </p:nvPr>
+        </p:nvSpPr>
+        <p:spPr/>
+        <p:txBody>
+          <a:bodyPr/>
+          <a:lstStyle/>
+          <a:p>
+            <a:pPr marL="0" indent="0">
+              <a:buNone/>
+            </a:pPr>
+            <a:r>
+              <a:rPr lang="de-AT" sz="2000" dirty="0"/>
+              <a:t>Inhalt der Datei u:\c#\00_HelloWelt\00_HelloWorld.cs</a:t>
+            </a:r>
+          </a:p>
+          <a:p>
+            <a:pPr marL="0" indent="0">
+              <a:buNone/>
+            </a:pPr>
+            <a:endParaRPr lang="de-AT" sz="2000" dirty="0"/>
+          </a:p>
+          <a:p>
+            <a:pPr marL="0" indent="0">
+              <a:buNone/>
+            </a:pPr>
+            <a:r>
+              <a:rPr lang="de-AT" sz="1800" dirty="0" err="1">
+                <a:solidFill>
+                  <a:srgbClr val="0000FF"/>
+                </a:solidFill>
+                <a:latin typeface="Consolas" panose="020B0609020204030204" pitchFamily="49" charset="0"/>
+              </a:rPr>
+              <a:t>using</a:t>
+            </a:r>
+            <a:r>
+              <a:rPr lang="de-AT" sz="1800" dirty="0">
+                <a:solidFill>
+                  <a:srgbClr val="000000"/>
+                </a:solidFill>
+                <a:latin typeface="Consolas" panose="020B0609020204030204" pitchFamily="49" charset="0"/>
+              </a:rPr>
+              <a:t> System;</a:t>
+            </a:r>
+          </a:p>
+          <a:p>
+            <a:pPr marL="0" indent="0">
+              <a:buNone/>
+            </a:pPr>
+            <a:r>
+              <a:rPr lang="de-AT" sz="1800" dirty="0" err="1">
+                <a:solidFill>
+                  <a:srgbClr val="000000"/>
+                </a:solidFill>
+                <a:latin typeface="Consolas" panose="020B0609020204030204" pitchFamily="49" charset="0"/>
+              </a:rPr>
+              <a:t>Console.WriteLine</a:t>
+            </a:r>
+            <a:r>
+              <a:rPr lang="de-AT" sz="1800" dirty="0">
+                <a:solidFill>
+                  <a:srgbClr val="000000"/>
+                </a:solidFill>
+                <a:latin typeface="Consolas" panose="020B0609020204030204" pitchFamily="49" charset="0"/>
+              </a:rPr>
+              <a:t>(</a:t>
+            </a:r>
+            <a:r>
+              <a:rPr lang="de-AT" sz="1800" dirty="0">
+                <a:solidFill>
+                  <a:srgbClr val="A31515"/>
+                </a:solidFill>
+                <a:latin typeface="Consolas" panose="020B0609020204030204" pitchFamily="49" charset="0"/>
+              </a:rPr>
+              <a:t>"Hello World"</a:t>
+            </a:r>
+            <a:r>
+              <a:rPr lang="de-AT" sz="1800" dirty="0">
+                <a:solidFill>
+                  <a:srgbClr val="000000"/>
+                </a:solidFill>
+                <a:latin typeface="Consolas" panose="020B0609020204030204" pitchFamily="49" charset="0"/>
+              </a:rPr>
+              <a:t>);</a:t>
+            </a:r>
+            <a:endParaRPr lang="de-AT" sz="2000" dirty="0"/>
+          </a:p>
+        </p:txBody>
+      </p:sp>
+    </p:spTree>
+    <p:extLst>
+      <p:ext uri="{BB962C8B-B14F-4D97-AF65-F5344CB8AC3E}">
+        <p14:creationId xmlns:p14="http://schemas.microsoft.com/office/powerpoint/2010/main" val="1879775361"/>
       </p:ext>
     </p:extLst>
   </p:cSld>
@@ -9880,7 +9828,7 @@
             <a:effectLst/>
             <a:extLst>
               <a:ext uri="{C572A759-6A51-4108-AA02-DFA0A04FC94B}">
-                <ma14:wrappingTextBoxFlag xmlns="" xmlns:ma14="http://schemas.microsoft.com/office/mac/drawingml/2011/main" val="1"/>
+                <ma14:wrappingTextBoxFlag xmlns:ma14="http://schemas.microsoft.com/office/mac/drawingml/2011/main" xmlns="" val="1"/>
               </a:ext>
             </a:extLst>
           </p:spPr>
@@ -10017,7 +9965,7 @@
           </a:ln>
           <a:extLst>
             <a:ext uri="{C572A759-6A51-4108-AA02-DFA0A04FC94B}">
-              <ma14:wrappingTextBoxFlag xmlns="" xmlns:ma14="http://schemas.microsoft.com/office/mac/drawingml/2011/main" val="1"/>
+              <ma14:wrappingTextBoxFlag xmlns:ma14="http://schemas.microsoft.com/office/mac/drawingml/2011/main" xmlns="" val="1"/>
             </a:ext>
           </a:extLst>
         </p:spPr>
@@ -10073,7 +10021,7 @@
           </a:ln>
           <a:extLst>
             <a:ext uri="{C572A759-6A51-4108-AA02-DFA0A04FC94B}">
-              <ma14:wrappingTextBoxFlag xmlns="" xmlns:ma14="http://schemas.microsoft.com/office/mac/drawingml/2011/main" val="1"/>
+              <ma14:wrappingTextBoxFlag xmlns:ma14="http://schemas.microsoft.com/office/mac/drawingml/2011/main" xmlns="" val="1"/>
             </a:ext>
           </a:extLst>
         </p:spPr>
@@ -10210,7 +10158,7 @@
             <a:effectLst/>
             <a:extLst>
               <a:ext uri="{C572A759-6A51-4108-AA02-DFA0A04FC94B}">
-                <ma14:wrappingTextBoxFlag xmlns="" xmlns:ma14="http://schemas.microsoft.com/office/mac/drawingml/2011/main" val="1"/>
+                <ma14:wrappingTextBoxFlag xmlns:ma14="http://schemas.microsoft.com/office/mac/drawingml/2011/main" xmlns="" val="1"/>
               </a:ext>
             </a:extLst>
           </p:spPr>
@@ -11043,515 +10991,6 @@
       </p:grpSpPr>
       <p:sp>
         <p:nvSpPr>
-          <p:cNvPr id="2" name="Titel 1"/>
-          <p:cNvSpPr>
-            <a:spLocks noGrp="1"/>
-          </p:cNvSpPr>
-          <p:nvPr>
-            <p:ph type="title"/>
-          </p:nvPr>
-        </p:nvSpPr>
-        <p:spPr/>
-        <p:txBody>
-          <a:bodyPr/>
-          <a:lstStyle/>
-          <a:p>
-            <a:r>
-              <a:rPr lang="de-DE" dirty="0"/>
-              <a:t>Grundgerüst eines C#-Programmes</a:t>
-            </a:r>
-          </a:p>
-        </p:txBody>
-      </p:sp>
-      <p:sp>
-        <p:nvSpPr>
-          <p:cNvPr id="4" name="Textfeld 3"/>
-          <p:cNvSpPr txBox="1"/>
-          <p:nvPr/>
-        </p:nvSpPr>
-        <p:spPr>
-          <a:xfrm>
-            <a:off x="683568" y="1412776"/>
-            <a:ext cx="7609776" cy="1477328"/>
-          </a:xfrm>
-          <a:prstGeom prst="rect">
-            <a:avLst/>
-          </a:prstGeom>
-          <a:noFill/>
-        </p:spPr>
-        <p:txBody>
-          <a:bodyPr wrap="none" rtlCol="0">
-            <a:spAutoFit/>
-          </a:bodyPr>
-          <a:lstStyle/>
-          <a:p>
-            <a:r>
-              <a:rPr lang="de-AT" dirty="0"/>
-              <a:t>Beim Vorgang des Codierens wird ein Algorithmus mit Hilfe einer</a:t>
-            </a:r>
-          </a:p>
-          <a:p>
-            <a:r>
-              <a:rPr lang="de-AT" dirty="0"/>
-              <a:t>Programmiersprache beschrieben. Wir verwenden dazu die Sprache C#.</a:t>
-            </a:r>
-          </a:p>
-          <a:p>
-            <a:endParaRPr lang="de-AT" dirty="0"/>
-          </a:p>
-          <a:p>
-            <a:pPr marL="285750" indent="-285750">
-              <a:buFont typeface="Arial" pitchFamily="34" charset="0"/>
-              <a:buChar char="•"/>
-            </a:pPr>
-            <a:r>
-              <a:rPr lang="de-AT" dirty="0"/>
-              <a:t>Ein Algorithmus muss in einer Methode codiert werden.</a:t>
-            </a:r>
-          </a:p>
-          <a:p>
-            <a:pPr marL="285750" indent="-285750">
-              <a:buFont typeface="Arial" pitchFamily="34" charset="0"/>
-              <a:buChar char="•"/>
-            </a:pPr>
-            <a:r>
-              <a:rPr lang="de-AT" dirty="0"/>
-              <a:t>Eine Methode muss innerhalb einer Klasse angelegt werden.</a:t>
-            </a:r>
-          </a:p>
-        </p:txBody>
-      </p:sp>
-      <p:sp>
-        <p:nvSpPr>
-          <p:cNvPr id="5" name="Abgerundetes Rechteck 4"/>
-          <p:cNvSpPr/>
-          <p:nvPr/>
-        </p:nvSpPr>
-        <p:spPr>
-          <a:xfrm>
-            <a:off x="996801" y="3214933"/>
-            <a:ext cx="2449531" cy="2448272"/>
-          </a:xfrm>
-          <a:prstGeom prst="roundRect">
-            <a:avLst/>
-          </a:prstGeom>
-          <a:solidFill>
-            <a:schemeClr val="accent1">
-              <a:lumMod val="20000"/>
-              <a:lumOff val="80000"/>
-            </a:schemeClr>
-          </a:solidFill>
-        </p:spPr>
-        <p:style>
-          <a:lnRef idx="2">
-            <a:schemeClr val="accent1">
-              <a:shade val="50000"/>
-            </a:schemeClr>
-          </a:lnRef>
-          <a:fillRef idx="1">
-            <a:schemeClr val="accent1"/>
-          </a:fillRef>
-          <a:effectRef idx="0">
-            <a:schemeClr val="accent1"/>
-          </a:effectRef>
-          <a:fontRef idx="minor">
-            <a:schemeClr val="lt1"/>
-          </a:fontRef>
-        </p:style>
-        <p:txBody>
-          <a:bodyPr rtlCol="0" anchor="ctr"/>
-          <a:lstStyle/>
-          <a:p>
-            <a:pPr algn="ctr"/>
-            <a:r>
-              <a:rPr lang="de-AT" dirty="0">
-                <a:solidFill>
-                  <a:schemeClr val="tx1"/>
-                </a:solidFill>
-              </a:rPr>
-              <a:t>Klasse </a:t>
-            </a:r>
-            <a:r>
-              <a:rPr lang="de-AT" dirty="0" err="1">
-                <a:solidFill>
-                  <a:schemeClr val="tx1"/>
-                </a:solidFill>
-                <a:latin typeface="Courier New" pitchFamily="49" charset="0"/>
-                <a:cs typeface="Courier New" pitchFamily="49" charset="0"/>
-              </a:rPr>
-              <a:t>Program</a:t>
-            </a:r>
-            <a:endParaRPr lang="de-AT" dirty="0">
-              <a:solidFill>
-                <a:schemeClr val="tx1"/>
-              </a:solidFill>
-              <a:latin typeface="Courier New" pitchFamily="49" charset="0"/>
-              <a:cs typeface="Courier New" pitchFamily="49" charset="0"/>
-            </a:endParaRPr>
-          </a:p>
-          <a:p>
-            <a:pPr algn="ctr"/>
-            <a:endParaRPr lang="de-AT" dirty="0">
-              <a:solidFill>
-                <a:schemeClr val="tx1"/>
-              </a:solidFill>
-            </a:endParaRPr>
-          </a:p>
-          <a:p>
-            <a:pPr algn="ctr"/>
-            <a:endParaRPr lang="de-AT" dirty="0">
-              <a:solidFill>
-                <a:schemeClr val="tx1"/>
-              </a:solidFill>
-            </a:endParaRPr>
-          </a:p>
-          <a:p>
-            <a:pPr algn="ctr"/>
-            <a:endParaRPr lang="de-AT" dirty="0">
-              <a:solidFill>
-                <a:schemeClr val="tx1"/>
-              </a:solidFill>
-            </a:endParaRPr>
-          </a:p>
-          <a:p>
-            <a:pPr algn="ctr"/>
-            <a:endParaRPr lang="de-AT" dirty="0">
-              <a:solidFill>
-                <a:schemeClr val="tx1"/>
-              </a:solidFill>
-            </a:endParaRPr>
-          </a:p>
-          <a:p>
-            <a:pPr algn="ctr"/>
-            <a:endParaRPr lang="de-AT" dirty="0">
-              <a:solidFill>
-                <a:schemeClr val="tx1"/>
-              </a:solidFill>
-            </a:endParaRPr>
-          </a:p>
-          <a:p>
-            <a:pPr algn="ctr"/>
-            <a:endParaRPr lang="de-AT" dirty="0">
-              <a:solidFill>
-                <a:schemeClr val="tx1"/>
-              </a:solidFill>
-            </a:endParaRPr>
-          </a:p>
-          <a:p>
-            <a:pPr algn="ctr"/>
-            <a:endParaRPr lang="de-AT" dirty="0">
-              <a:solidFill>
-                <a:schemeClr val="tx1"/>
-              </a:solidFill>
-            </a:endParaRPr>
-          </a:p>
-        </p:txBody>
-      </p:sp>
-      <p:sp>
-        <p:nvSpPr>
-          <p:cNvPr id="6" name="Abgerundetes Rechteck 5"/>
-          <p:cNvSpPr/>
-          <p:nvPr/>
-        </p:nvSpPr>
-        <p:spPr>
-          <a:xfrm>
-            <a:off x="1243945" y="5011832"/>
-            <a:ext cx="1914355" cy="432048"/>
-          </a:xfrm>
-          <a:prstGeom prst="roundRect">
-            <a:avLst/>
-          </a:prstGeom>
-          <a:solidFill>
-            <a:schemeClr val="accent6">
-              <a:lumMod val="20000"/>
-              <a:lumOff val="80000"/>
-            </a:schemeClr>
-          </a:solidFill>
-          <a:ln>
-            <a:solidFill>
-              <a:schemeClr val="accent6"/>
-            </a:solidFill>
-          </a:ln>
-        </p:spPr>
-        <p:style>
-          <a:lnRef idx="2">
-            <a:schemeClr val="accent1">
-              <a:shade val="50000"/>
-            </a:schemeClr>
-          </a:lnRef>
-          <a:fillRef idx="1">
-            <a:schemeClr val="accent1"/>
-          </a:fillRef>
-          <a:effectRef idx="0">
-            <a:schemeClr val="accent1"/>
-          </a:effectRef>
-          <a:fontRef idx="minor">
-            <a:schemeClr val="lt1"/>
-          </a:fontRef>
-        </p:style>
-        <p:txBody>
-          <a:bodyPr rtlCol="0" anchor="ctr"/>
-          <a:lstStyle/>
-          <a:p>
-            <a:pPr algn="ctr"/>
-            <a:r>
-              <a:rPr lang="de-AT" dirty="0">
-                <a:solidFill>
-                  <a:schemeClr val="tx1"/>
-                </a:solidFill>
-              </a:rPr>
-              <a:t>Methode  </a:t>
-            </a:r>
-            <a:r>
-              <a:rPr lang="de-AT" dirty="0">
-                <a:solidFill>
-                  <a:schemeClr val="tx1"/>
-                </a:solidFill>
-                <a:latin typeface="Courier New" pitchFamily="49" charset="0"/>
-                <a:cs typeface="Courier New" pitchFamily="49" charset="0"/>
-              </a:rPr>
-              <a:t>m2</a:t>
-            </a:r>
-          </a:p>
-        </p:txBody>
-      </p:sp>
-      <p:sp>
-        <p:nvSpPr>
-          <p:cNvPr id="7" name="Abgerundetes Rechteck 6"/>
-          <p:cNvSpPr/>
-          <p:nvPr/>
-        </p:nvSpPr>
-        <p:spPr>
-          <a:xfrm>
-            <a:off x="1244374" y="4439069"/>
-            <a:ext cx="1913926" cy="432048"/>
-          </a:xfrm>
-          <a:prstGeom prst="roundRect">
-            <a:avLst/>
-          </a:prstGeom>
-          <a:solidFill>
-            <a:schemeClr val="accent6">
-              <a:lumMod val="20000"/>
-              <a:lumOff val="80000"/>
-            </a:schemeClr>
-          </a:solidFill>
-          <a:ln>
-            <a:solidFill>
-              <a:schemeClr val="accent6"/>
-            </a:solidFill>
-          </a:ln>
-        </p:spPr>
-        <p:style>
-          <a:lnRef idx="2">
-            <a:schemeClr val="accent1">
-              <a:shade val="50000"/>
-            </a:schemeClr>
-          </a:lnRef>
-          <a:fillRef idx="1">
-            <a:schemeClr val="accent1"/>
-          </a:fillRef>
-          <a:effectRef idx="0">
-            <a:schemeClr val="accent1"/>
-          </a:effectRef>
-          <a:fontRef idx="minor">
-            <a:schemeClr val="lt1"/>
-          </a:fontRef>
-        </p:style>
-        <p:txBody>
-          <a:bodyPr rtlCol="0" anchor="ctr"/>
-          <a:lstStyle/>
-          <a:p>
-            <a:pPr algn="ctr"/>
-            <a:r>
-              <a:rPr lang="de-AT" dirty="0">
-                <a:solidFill>
-                  <a:schemeClr val="tx1"/>
-                </a:solidFill>
-              </a:rPr>
-              <a:t>Methode  </a:t>
-            </a:r>
-            <a:r>
-              <a:rPr lang="de-AT" dirty="0">
-                <a:solidFill>
-                  <a:schemeClr val="tx1"/>
-                </a:solidFill>
-                <a:latin typeface="Courier New" pitchFamily="49" charset="0"/>
-                <a:cs typeface="Courier New" pitchFamily="49" charset="0"/>
-              </a:rPr>
-              <a:t>m1</a:t>
-            </a:r>
-          </a:p>
-        </p:txBody>
-      </p:sp>
-      <p:sp>
-        <p:nvSpPr>
-          <p:cNvPr id="8" name="Abgerundetes Rechteck 7"/>
-          <p:cNvSpPr/>
-          <p:nvPr/>
-        </p:nvSpPr>
-        <p:spPr>
-          <a:xfrm>
-            <a:off x="1257198" y="3816724"/>
-            <a:ext cx="1901102" cy="432048"/>
-          </a:xfrm>
-          <a:prstGeom prst="roundRect">
-            <a:avLst/>
-          </a:prstGeom>
-          <a:solidFill>
-            <a:schemeClr val="accent2">
-              <a:lumMod val="20000"/>
-              <a:lumOff val="80000"/>
-            </a:schemeClr>
-          </a:solidFill>
-          <a:ln>
-            <a:solidFill>
-              <a:srgbClr val="FF0000"/>
-            </a:solidFill>
-          </a:ln>
-        </p:spPr>
-        <p:style>
-          <a:lnRef idx="2">
-            <a:schemeClr val="accent1">
-              <a:shade val="50000"/>
-            </a:schemeClr>
-          </a:lnRef>
-          <a:fillRef idx="1">
-            <a:schemeClr val="accent1"/>
-          </a:fillRef>
-          <a:effectRef idx="0">
-            <a:schemeClr val="accent1"/>
-          </a:effectRef>
-          <a:fontRef idx="minor">
-            <a:schemeClr val="lt1"/>
-          </a:fontRef>
-        </p:style>
-        <p:txBody>
-          <a:bodyPr rtlCol="0" anchor="ctr"/>
-          <a:lstStyle/>
-          <a:p>
-            <a:pPr algn="ctr"/>
-            <a:r>
-              <a:rPr lang="de-AT" dirty="0">
-                <a:solidFill>
-                  <a:schemeClr val="tx1"/>
-                </a:solidFill>
-              </a:rPr>
-              <a:t>Methode  </a:t>
-            </a:r>
-            <a:r>
-              <a:rPr lang="de-AT" dirty="0">
-                <a:solidFill>
-                  <a:schemeClr val="tx1"/>
-                </a:solidFill>
-                <a:latin typeface="Courier New" pitchFamily="49" charset="0"/>
-                <a:cs typeface="Courier New" pitchFamily="49" charset="0"/>
-              </a:rPr>
-              <a:t>Main</a:t>
-            </a:r>
-          </a:p>
-        </p:txBody>
-      </p:sp>
-      <p:cxnSp>
-        <p:nvCxnSpPr>
-          <p:cNvPr id="9" name="Gerade Verbindung mit Pfeil 8"/>
-          <p:cNvCxnSpPr>
-            <a:stCxn id="8" idx="3"/>
-            <a:endCxn id="10" idx="1"/>
-          </p:cNvCxnSpPr>
-          <p:nvPr/>
-        </p:nvCxnSpPr>
-        <p:spPr>
-          <a:xfrm>
-            <a:off x="3158300" y="4032748"/>
-            <a:ext cx="1296144" cy="14923"/>
-          </a:xfrm>
-          <a:prstGeom prst="straightConnector1">
-            <a:avLst/>
-          </a:prstGeom>
-          <a:ln w="25400">
-            <a:solidFill>
-              <a:srgbClr val="FF0000"/>
-            </a:solidFill>
-            <a:headEnd type="arrow"/>
-            <a:tailEnd type="none"/>
-          </a:ln>
-        </p:spPr>
-        <p:style>
-          <a:lnRef idx="1">
-            <a:schemeClr val="accent1"/>
-          </a:lnRef>
-          <a:fillRef idx="0">
-            <a:schemeClr val="accent1"/>
-          </a:fillRef>
-          <a:effectRef idx="0">
-            <a:schemeClr val="accent1"/>
-          </a:effectRef>
-          <a:fontRef idx="minor">
-            <a:schemeClr val="tx1"/>
-          </a:fontRef>
-        </p:style>
-      </p:cxnSp>
-      <p:sp>
-        <p:nvSpPr>
-          <p:cNvPr id="10" name="Textfeld 9"/>
-          <p:cNvSpPr txBox="1"/>
-          <p:nvPr/>
-        </p:nvSpPr>
-        <p:spPr>
-          <a:xfrm>
-            <a:off x="4454444" y="3863005"/>
-            <a:ext cx="2882264" cy="369332"/>
-          </a:xfrm>
-          <a:prstGeom prst="rect">
-            <a:avLst/>
-          </a:prstGeom>
-          <a:noFill/>
-        </p:spPr>
-        <p:txBody>
-          <a:bodyPr wrap="none" rtlCol="0">
-            <a:spAutoFit/>
-          </a:bodyPr>
-          <a:lstStyle/>
-          <a:p>
-            <a:r>
-              <a:rPr lang="de-AT" dirty="0"/>
-              <a:t>wird automatisch ausgeführt</a:t>
-            </a:r>
-          </a:p>
-        </p:txBody>
-      </p:sp>
-    </p:spTree>
-    <p:extLst>
-      <p:ext uri="{BB962C8B-B14F-4D97-AF65-F5344CB8AC3E}">
-        <p14:creationId xmlns:p14="http://schemas.microsoft.com/office/powerpoint/2010/main" val="354333883"/>
-      </p:ext>
-    </p:extLst>
-  </p:cSld>
-  <p:clrMapOvr>
-    <a:masterClrMapping/>
-  </p:clrMapOvr>
-</p:sld>
-</file>
-
-<file path=ppt/slides/slide7.xml><?xml version="1.0" encoding="utf-8"?>
-<p:sld xmlns:a="http://schemas.openxmlformats.org/drawingml/2006/main" xmlns:r="http://schemas.openxmlformats.org/officeDocument/2006/relationships" xmlns:p="http://schemas.openxmlformats.org/presentationml/2006/main">
-  <p:cSld>
-    <p:spTree>
-      <p:nvGrpSpPr>
-        <p:cNvPr id="1" name=""/>
-        <p:cNvGrpSpPr/>
-        <p:nvPr/>
-      </p:nvGrpSpPr>
-      <p:grpSpPr>
-        <a:xfrm>
-          <a:off x="0" y="0"/>
-          <a:ext cx="0" cy="0"/>
-          <a:chOff x="0" y="0"/>
-          <a:chExt cx="0" cy="0"/>
-        </a:xfrm>
-      </p:grpSpPr>
-      <p:sp>
-        <p:nvSpPr>
           <p:cNvPr id="20482" name="Titel 1"/>
           <p:cNvSpPr>
             <a:spLocks noGrp="1"/>
@@ -11940,7 +11379,7 @@
                 <a:buFontTx/>
                 <a:buNone/>
               </a:pPr>
-              <a:t>7</a:t>
+              <a:t>6</a:t>
             </a:fld>
             <a:endParaRPr lang="de-DE" altLang="de-DE" sz="1400">
               <a:solidFill>
